--- a/lectures/b05/ppt/b05-l01.pptx
+++ b/lectures/b05/ppt/b05-l01.pptx
@@ -5185,7 +5185,7 @@
                 <a:ea typeface="Malgun Gothic"/>
                 <a:cs typeface="Malgun Gothic"/>
               </a:rPr>
-              <a:t>질환 수정 치료(항아밀로이드 항체 레카네맙·도나네맙)와 ARIA 위험의 APOE4 의존성은 B08 L04에서 다룬다. </a:t>
+              <a:t>질환 수정 치료(항아밀로이드 항체 레카네맙·도나네맙)와 ARIA 위험의 APOE4 의존성은 B08 L07에서 다룬다. </a:t>
             </a:r>
             <a:r>
               <a:rPr sz="1800" b="1" i="0">
